--- a/public/fun/pack/pptx/familypro/가족소개프리미엄_35_반려동물과함께_오닉스골드.pptx
+++ b/public/fun/pack/pptx/familypro/가족소개프리미엄_35_반려동물과함께_오닉스골드.pptx
@@ -113,12 +113,12 @@
   <p:extLst>
     <p:ext uri="{521415D9-36F7-43E2-AB2F-B90AF26B5E84}">
       <p14:sectionLst xmlns:p14="http://schemas.microsoft.com/office/powerpoint/2010/main">
-        <p14:section name="시작" id="{5E93CF2F-2BAF-48FF-BBF2-0DB0E75B0DB5}">
+        <p14:section name="시작" id="{70C126FE-E2B4-4060-B2AD-91C31AA67CE7}">
           <p14:sldIdLst>
             <p14:sldId id="256"/>
           </p14:sldIdLst>
         </p14:section>
-        <p14:section name="본문" id="{407559FF-1D19-4B3D-B66C-91EE2D60EC42}">
+        <p14:section name="본문" id="{3BC47385-1D64-4D04-9292-086A11AABB49}">
           <p14:sldIdLst>
             <p14:sldId id="257"/>
             <p14:sldId id="258"/>
@@ -127,7 +127,7 @@
             <p14:sldId id="261"/>
           </p14:sldIdLst>
         </p14:section>
-        <p14:section name="마무리" id="{B422F804-633E-4B6F-B428-F448C0E7845D}">
+        <p14:section name="마무리" id="{0E48F16E-1B16-43BE-AADB-DE48A61A304C}">
           <p14:sldIdLst>
             <p14:sldId id="262"/>
           </p14:sldIdLst>
@@ -1513,7 +1513,7 @@
             </a:lvl1pPr>
           </a:lstStyle>
           <a:p>
-            <a:fld id="{05E1D0C4-A9A3-43FC-AC5A-36888957220E}" type="slidenum">
+            <a:fld id="{F0F7FC0A-1EAF-4142-9BEF-182BEED7A638}" type="slidenum">
               <a:rPr lang="en-US"/>
               <a:t>‹#›</a:t>
             </a:fld>
@@ -2178,7 +2178,7 @@
             </a:lvl1pPr>
           </a:lstStyle>
           <a:p>
-            <a:fld id="{F1CB70F4-C333-43DA-B3D0-75AC9FD26D6D}" type="slidenum">
+            <a:fld id="{021584CC-1BE3-400C-83D9-8A7A729BA42A}" type="slidenum">
               <a:rPr lang="en-US"/>
               <a:t>‹#›</a:t>
             </a:fld>
@@ -2870,7 +2870,7 @@
             </a:lvl1pPr>
           </a:lstStyle>
           <a:p>
-            <a:fld id="{D2CFD707-0C98-4178-B09C-C9D6BA6D8CA1}" type="slidenum">
+            <a:fld id="{7499692C-DAF9-4F6A-8AFC-31BD968857C9}" type="slidenum">
               <a:rPr lang="en-US"/>
               <a:t>‹#›</a:t>
             </a:fld>
@@ -3715,7 +3715,7 @@
           <a:p>
             <a:r>
               <a:rPr lang="ko-KR"/>
-              <a:t>반려동물과 함께 · 0000. 00. 00</a:t>
+              <a:t>반려동물과 함께 · 날짜 입력</a:t>
             </a:r>
           </a:p>
         </p:txBody>
@@ -4022,7 +4022,7 @@
           <a:bodyPr/>
           <a:lstStyle/>
           <a:p>
-            <a:fld id="{C1252F2D-4D29-47BB-87B9-68768D5A8420}" type="slidenum">
+            <a:fld id="{0BB30109-A77A-4808-A022-BF93E8938BFD}" type="slidenum">
               <a:rPr lang="en-US"/>
               <a:t>‹#›</a:t>
             </a:fld>
@@ -4653,7 +4653,7 @@
           <a:bodyPr/>
           <a:lstStyle/>
           <a:p>
-            <a:fld id="{D968CAC5-D21F-49DE-974C-D8D3FA61B940}" type="slidenum">
+            <a:fld id="{6996B299-C6FF-4FE7-A777-01937A1DB2BA}" type="slidenum">
               <a:rPr lang="en-US"/>
               <a:t>‹#›</a:t>
             </a:fld>
@@ -5495,7 +5495,7 @@
           <a:bodyPr/>
           <a:lstStyle/>
           <a:p>
-            <a:fld id="{8063948B-E60A-404E-B62E-3071D22201C3}" type="slidenum">
+            <a:fld id="{4FD6A436-DCC0-4847-BB2D-F0AD26AF63AF}" type="slidenum">
               <a:rPr lang="en-US"/>
               <a:t>‹#›</a:t>
             </a:fld>
@@ -6819,7 +6819,7 @@
           <a:bodyPr/>
           <a:lstStyle/>
           <a:p>
-            <a:fld id="{797972EA-9B01-44C6-A7CB-4C0B073A346B}" type="slidenum">
+            <a:fld id="{B8B2DF4E-CD5D-4F66-8710-D1885D770D5E}" type="slidenum">
               <a:rPr lang="en-US"/>
               <a:t>‹#›</a:t>
             </a:fld>
@@ -6907,7 +6907,7 @@
           <a:bodyPr/>
           <a:lstStyle/>
           <a:p>
-            <a:fld id="{6AC7DAA4-0160-4B20-9B67-72B2D9E799BF}" type="slidenum">
+            <a:fld id="{5A1B2014-C0AB-41DE-B9F7-D6C3F587BBB6}" type="slidenum">
               <a:rPr lang="en-US"/>
               <a:t>‹#›</a:t>
             </a:fld>
